--- a/эшх.pptx
+++ b/эшх.pptx
@@ -3816,17 +3816,6 @@
             <a:pPr marL="0" indent="0" algn="r">
               <a:buNone/>
             </a:pPr>
-            <a:r>
-              <a:rPr lang="en-US" sz="1300" dirty="0">
-                <a:solidFill>
-                  <a:srgbClr val="6B7A8A"/>
-                </a:solidFill>
-                <a:latin typeface="Calibri" pitchFamily="34" charset="0"/>
-                <a:ea typeface="Calibri" pitchFamily="34" charset="-122"/>
-                <a:cs typeface="Calibri" pitchFamily="34" charset="-120"/>
-              </a:rPr>
-              <a:t>3</a:t>
-            </a:r>
             <a:endParaRPr lang="en-US" sz="1300" dirty="0"/>
           </a:p>
         </p:txBody>
@@ -4371,20 +4360,479 @@
       </p:sp>
       <p:sp>
         <p:nvSpPr>
-          <p:cNvPr id="21" name="Shape 19"/>
-          <p:cNvSpPr/>
-          <p:nvPr/>
-        </p:nvSpPr>
-        <p:spPr>
-          <a:xfrm>
-            <a:off x="5577840" y="914400"/>
-            <a:ext cx="3154680" cy="3840480"/>
-          </a:xfrm>
-          <a:prstGeom prst="rect">
-            <a:avLst/>
-          </a:prstGeom>
-          <a:solidFill>
-            <a:srgbClr val="FFFFFF"/>
+          <p:cNvPr id="22" name="Text 20"/>
+          <p:cNvSpPr/>
+          <p:nvPr/>
+        </p:nvSpPr>
+        <p:spPr>
+          <a:xfrm>
+            <a:off x="5577840" y="1005840"/>
+            <a:ext cx="3154680" cy="365760"/>
+          </a:xfrm>
+          <a:prstGeom prst="rect">
+            <a:avLst/>
+          </a:prstGeom>
+          <a:noFill/>
+          <a:ln/>
+        </p:spPr>
+        <p:txBody>
+          <a:bodyPr wrap="square" rtlCol="0" anchor="t"/>
+          <a:lstStyle/>
+          <a:p>
+            <a:pPr marL="0" indent="0" algn="ctr">
+              <a:buNone/>
+            </a:pPr>
+            <a:r>
+              <a:rPr lang="en-US" sz="1300" b="1" dirty="0">
+                <a:solidFill>
+                  <a:srgbClr val="1A3A5C"/>
+                </a:solidFill>
+                <a:latin typeface="Calibri" pitchFamily="34" charset="0"/>
+                <a:ea typeface="Calibri" pitchFamily="34" charset="-122"/>
+                <a:cs typeface="Calibri" pitchFamily="34" charset="-120"/>
+              </a:rPr>
+              <a:t>Ангиллын тархалт</a:t>
+            </a:r>
+            <a:endParaRPr lang="en-US" sz="1300" dirty="0"/>
+          </a:p>
+        </p:txBody>
+      </p:sp>
+      <p:sp>
+        <p:nvSpPr>
+          <p:cNvPr id="23" name="Shape 21"/>
+          <p:cNvSpPr/>
+          <p:nvPr/>
+        </p:nvSpPr>
+        <p:spPr>
+          <a:xfrm>
+            <a:off x="5715000" y="1389888"/>
+            <a:ext cx="2880360" cy="0"/>
+          </a:xfrm>
+          <a:prstGeom prst="line">
+            <a:avLst/>
+          </a:prstGeom>
+          <a:noFill/>
+          <a:ln w="6350">
+            <a:solidFill>
+              <a:srgbClr val="D0D8E0"/>
+            </a:solidFill>
+            <a:prstDash val="solid"/>
+          </a:ln>
+        </p:spPr>
+      </p:sp>
+      <p:sp>
+        <p:nvSpPr>
+          <p:cNvPr id="24" name="Text 22"/>
+          <p:cNvSpPr/>
+          <p:nvPr/>
+        </p:nvSpPr>
+        <p:spPr>
+          <a:xfrm>
+            <a:off x="5715000" y="1389887"/>
+            <a:ext cx="2011680" cy="274320"/>
+          </a:xfrm>
+          <a:prstGeom prst="rect">
+            <a:avLst/>
+          </a:prstGeom>
+          <a:noFill/>
+          <a:ln/>
+        </p:spPr>
+        <p:txBody>
+          <a:bodyPr wrap="square" rtlCol="0" anchor="t"/>
+          <a:lstStyle/>
+          <a:p>
+            <a:pPr marL="0" indent="0" algn="l">
+              <a:buNone/>
+            </a:pPr>
+            <a:r>
+              <a:rPr lang="en-US" sz="1200" dirty="0">
+                <a:solidFill>
+                  <a:srgbClr val="1C2733"/>
+                </a:solidFill>
+                <a:latin typeface="Calibri" pitchFamily="34" charset="0"/>
+                <a:ea typeface="Calibri" pitchFamily="34" charset="-122"/>
+                <a:cs typeface="Calibri" pitchFamily="34" charset="-120"/>
+              </a:rPr>
+              <a:t>Хэвийн бус</a:t>
+            </a:r>
+            <a:endParaRPr lang="en-US" sz="1200" dirty="0"/>
+          </a:p>
+        </p:txBody>
+      </p:sp>
+      <p:sp>
+        <p:nvSpPr>
+          <p:cNvPr id="25" name="Text 23"/>
+          <p:cNvSpPr/>
+          <p:nvPr/>
+        </p:nvSpPr>
+        <p:spPr>
+          <a:xfrm>
+            <a:off x="7360920" y="1389887"/>
+            <a:ext cx="1188720" cy="274320"/>
+          </a:xfrm>
+          <a:prstGeom prst="rect">
+            <a:avLst/>
+          </a:prstGeom>
+          <a:noFill/>
+          <a:ln/>
+        </p:spPr>
+        <p:txBody>
+          <a:bodyPr wrap="square" rtlCol="0" anchor="t"/>
+          <a:lstStyle/>
+          <a:p>
+            <a:pPr marL="0" indent="0" algn="r">
+              <a:buNone/>
+            </a:pPr>
+            <a:r>
+              <a:rPr lang="en-US" sz="1200" dirty="0">
+                <a:solidFill>
+                  <a:srgbClr val="6B7A8A"/>
+                </a:solidFill>
+                <a:latin typeface="Calibri" pitchFamily="34" charset="0"/>
+                <a:ea typeface="Calibri" pitchFamily="34" charset="-122"/>
+                <a:cs typeface="Calibri" pitchFamily="34" charset="-120"/>
+              </a:rPr>
+              <a:t>2,575</a:t>
+            </a:r>
+            <a:endParaRPr lang="en-US" sz="1200" dirty="0"/>
+          </a:p>
+        </p:txBody>
+      </p:sp>
+      <p:sp>
+        <p:nvSpPr>
+          <p:cNvPr id="26" name="Shape 24"/>
+          <p:cNvSpPr/>
+          <p:nvPr/>
+        </p:nvSpPr>
+        <p:spPr>
+          <a:xfrm>
+            <a:off x="5715000" y="1709927"/>
+            <a:ext cx="2834640" cy="347472"/>
+          </a:xfrm>
+          <a:prstGeom prst="rect">
+            <a:avLst/>
+          </a:prstGeom>
+          <a:solidFill>
+            <a:srgbClr val="D0D8E0"/>
+          </a:solidFill>
+          <a:ln/>
+        </p:spPr>
+      </p:sp>
+      <p:sp>
+        <p:nvSpPr>
+          <p:cNvPr id="27" name="Shape 25"/>
+          <p:cNvSpPr/>
+          <p:nvPr/>
+        </p:nvSpPr>
+        <p:spPr>
+          <a:xfrm>
+            <a:off x="5715000" y="1709927"/>
+            <a:ext cx="2253539" cy="347472"/>
+          </a:xfrm>
+          <a:prstGeom prst="rect">
+            <a:avLst/>
+          </a:prstGeom>
+          <a:solidFill>
+            <a:srgbClr val="2563A8"/>
+          </a:solidFill>
+          <a:ln/>
+        </p:spPr>
+      </p:sp>
+      <p:sp>
+        <p:nvSpPr>
+          <p:cNvPr id="28" name="Text 26"/>
+          <p:cNvSpPr/>
+          <p:nvPr/>
+        </p:nvSpPr>
+        <p:spPr>
+          <a:xfrm>
+            <a:off x="5715000" y="1709927"/>
+            <a:ext cx="2834640" cy="347472"/>
+          </a:xfrm>
+          <a:prstGeom prst="rect">
+            <a:avLst/>
+          </a:prstGeom>
+          <a:noFill/>
+          <a:ln/>
+        </p:spPr>
+        <p:txBody>
+          <a:bodyPr wrap="square" rtlCol="0" anchor="ctr"/>
+          <a:lstStyle/>
+          <a:p>
+            <a:pPr marL="0" indent="0" algn="ctr">
+              <a:buNone/>
+            </a:pPr>
+            <a:r>
+              <a:rPr lang="en-US" sz="1200" b="1" dirty="0">
+                <a:solidFill>
+                  <a:srgbClr val="FFFFFF"/>
+                </a:solidFill>
+                <a:latin typeface="Calibri" pitchFamily="34" charset="0"/>
+                <a:ea typeface="Calibri" pitchFamily="34" charset="-122"/>
+                <a:cs typeface="Calibri" pitchFamily="34" charset="-120"/>
+              </a:rPr>
+              <a:t>79.5%</a:t>
+            </a:r>
+            <a:endParaRPr lang="en-US" sz="1200" dirty="0"/>
+          </a:p>
+        </p:txBody>
+      </p:sp>
+      <p:sp>
+        <p:nvSpPr>
+          <p:cNvPr id="29" name="Text 27"/>
+          <p:cNvSpPr/>
+          <p:nvPr/>
+        </p:nvSpPr>
+        <p:spPr>
+          <a:xfrm>
+            <a:off x="5715000" y="2057399"/>
+            <a:ext cx="2011680" cy="274320"/>
+          </a:xfrm>
+          <a:prstGeom prst="rect">
+            <a:avLst/>
+          </a:prstGeom>
+          <a:noFill/>
+          <a:ln/>
+        </p:spPr>
+        <p:txBody>
+          <a:bodyPr wrap="square" rtlCol="0" anchor="t"/>
+          <a:lstStyle/>
+          <a:p>
+            <a:pPr marL="0" indent="0" algn="l">
+              <a:buNone/>
+            </a:pPr>
+            <a:r>
+              <a:rPr lang="en-US" sz="1200" dirty="0">
+                <a:solidFill>
+                  <a:srgbClr val="1C2733"/>
+                </a:solidFill>
+                <a:latin typeface="Calibri" pitchFamily="34" charset="0"/>
+                <a:ea typeface="Calibri" pitchFamily="34" charset="-122"/>
+                <a:cs typeface="Calibri" pitchFamily="34" charset="-120"/>
+              </a:rPr>
+              <a:t>Хэвийн</a:t>
+            </a:r>
+            <a:endParaRPr lang="en-US" sz="1200" dirty="0"/>
+          </a:p>
+        </p:txBody>
+      </p:sp>
+      <p:sp>
+        <p:nvSpPr>
+          <p:cNvPr id="30" name="Text 28"/>
+          <p:cNvSpPr/>
+          <p:nvPr/>
+        </p:nvSpPr>
+        <p:spPr>
+          <a:xfrm>
+            <a:off x="7360920" y="2057399"/>
+            <a:ext cx="1188720" cy="274320"/>
+          </a:xfrm>
+          <a:prstGeom prst="rect">
+            <a:avLst/>
+          </a:prstGeom>
+          <a:noFill/>
+          <a:ln/>
+        </p:spPr>
+        <p:txBody>
+          <a:bodyPr wrap="square" rtlCol="0" anchor="t"/>
+          <a:lstStyle/>
+          <a:p>
+            <a:pPr marL="0" indent="0" algn="r">
+              <a:buNone/>
+            </a:pPr>
+            <a:r>
+              <a:rPr lang="en-US" sz="1200" dirty="0">
+                <a:solidFill>
+                  <a:srgbClr val="6B7A8A"/>
+                </a:solidFill>
+                <a:latin typeface="Calibri" pitchFamily="34" charset="0"/>
+                <a:ea typeface="Calibri" pitchFamily="34" charset="-122"/>
+                <a:cs typeface="Calibri" pitchFamily="34" charset="-120"/>
+              </a:rPr>
+              <a:t>665</a:t>
+            </a:r>
+            <a:endParaRPr lang="en-US" sz="1200" dirty="0"/>
+          </a:p>
+        </p:txBody>
+      </p:sp>
+      <p:sp>
+        <p:nvSpPr>
+          <p:cNvPr id="31" name="Shape 29"/>
+          <p:cNvSpPr/>
+          <p:nvPr/>
+        </p:nvSpPr>
+        <p:spPr>
+          <a:xfrm>
+            <a:off x="5715000" y="2377439"/>
+            <a:ext cx="2834640" cy="347472"/>
+          </a:xfrm>
+          <a:prstGeom prst="rect">
+            <a:avLst/>
+          </a:prstGeom>
+          <a:solidFill>
+            <a:srgbClr val="D0D8E0"/>
+          </a:solidFill>
+          <a:ln/>
+        </p:spPr>
+      </p:sp>
+      <p:sp>
+        <p:nvSpPr>
+          <p:cNvPr id="32" name="Shape 30"/>
+          <p:cNvSpPr/>
+          <p:nvPr/>
+        </p:nvSpPr>
+        <p:spPr>
+          <a:xfrm>
+            <a:off x="5715000" y="2377439"/>
+            <a:ext cx="581101" cy="347472"/>
+          </a:xfrm>
+          <a:prstGeom prst="rect">
+            <a:avLst/>
+          </a:prstGeom>
+          <a:solidFill>
+            <a:srgbClr val="4A7FB5"/>
+          </a:solidFill>
+          <a:ln/>
+        </p:spPr>
+      </p:sp>
+      <p:sp>
+        <p:nvSpPr>
+          <p:cNvPr id="33" name="Text 31"/>
+          <p:cNvSpPr/>
+          <p:nvPr/>
+        </p:nvSpPr>
+        <p:spPr>
+          <a:xfrm>
+            <a:off x="5715000" y="2377439"/>
+            <a:ext cx="2834640" cy="347472"/>
+          </a:xfrm>
+          <a:prstGeom prst="rect">
+            <a:avLst/>
+          </a:prstGeom>
+          <a:noFill/>
+          <a:ln/>
+        </p:spPr>
+        <p:txBody>
+          <a:bodyPr wrap="square" rtlCol="0" anchor="ctr"/>
+          <a:lstStyle/>
+          <a:p>
+            <a:pPr marL="0" indent="0" algn="ctr">
+              <a:buNone/>
+            </a:pPr>
+            <a:r>
+              <a:rPr lang="en-US" sz="1200" b="1" dirty="0">
+                <a:solidFill>
+                  <a:srgbClr val="FFFFFF"/>
+                </a:solidFill>
+                <a:latin typeface="Calibri" pitchFamily="34" charset="0"/>
+                <a:ea typeface="Calibri" pitchFamily="34" charset="-122"/>
+                <a:cs typeface="Calibri" pitchFamily="34" charset="-120"/>
+              </a:rPr>
+              <a:t>20.5%</a:t>
+            </a:r>
+            <a:endParaRPr lang="en-US" sz="1200" dirty="0"/>
+          </a:p>
+        </p:txBody>
+      </p:sp>
+      <p:sp>
+        <p:nvSpPr>
+          <p:cNvPr id="34" name="Shape 32"/>
+          <p:cNvSpPr/>
+          <p:nvPr/>
+        </p:nvSpPr>
+        <p:spPr>
+          <a:xfrm>
+            <a:off x="5715000" y="2922462"/>
+            <a:ext cx="2834640" cy="530352"/>
+          </a:xfrm>
+          <a:prstGeom prst="rect">
+            <a:avLst/>
+          </a:prstGeom>
+          <a:solidFill>
+            <a:srgbClr val="D6E4F0">
+              <a:alpha val="70000"/>
+            </a:srgbClr>
+          </a:solidFill>
+          <a:ln w="9525">
+            <a:solidFill>
+              <a:srgbClr val="4A7FB5"/>
+            </a:solidFill>
+            <a:prstDash val="solid"/>
+          </a:ln>
+        </p:spPr>
+      </p:sp>
+      <p:sp>
+        <p:nvSpPr>
+          <p:cNvPr id="35" name="Text 33"/>
+          <p:cNvSpPr/>
+          <p:nvPr/>
+        </p:nvSpPr>
+        <p:spPr>
+          <a:xfrm>
+            <a:off x="5852160" y="2968182"/>
+            <a:ext cx="2651760" cy="457200"/>
+          </a:xfrm>
+          <a:prstGeom prst="rect">
+            <a:avLst/>
+          </a:prstGeom>
+          <a:noFill/>
+          <a:ln/>
+        </p:spPr>
+        <p:txBody>
+          <a:bodyPr wrap="square" rtlCol="0" anchor="t"/>
+          <a:lstStyle/>
+          <a:p>
+            <a:pPr marL="0" indent="0" algn="l">
+              <a:buNone/>
+            </a:pPr>
+            <a:r>
+              <a:rPr lang="en-US" sz="1100" dirty="0">
+                <a:solidFill>
+                  <a:srgbClr val="1A3A5C"/>
+                </a:solidFill>
+                <a:latin typeface="Calibri" pitchFamily="34" charset="0"/>
+                <a:ea typeface="Calibri" pitchFamily="34" charset="-122"/>
+                <a:cs typeface="Calibri" pitchFamily="34" charset="-120"/>
+              </a:rPr>
+              <a:t>Тэнцвэргүй тархалт →</a:t>
+            </a:r>
+            <a:endParaRPr lang="en-US" sz="1100" dirty="0"/>
+          </a:p>
+          <a:p>
+            <a:pPr marL="0" indent="0" algn="l">
+              <a:buNone/>
+            </a:pPr>
+            <a:r>
+              <a:rPr lang="en-US" sz="1100" dirty="0">
+                <a:solidFill>
+                  <a:srgbClr val="1A3A5C"/>
+                </a:solidFill>
+                <a:latin typeface="Calibri" pitchFamily="34" charset="0"/>
+                <a:ea typeface="Calibri" pitchFamily="34" charset="-122"/>
+                <a:cs typeface="Calibri" pitchFamily="34" charset="-120"/>
+              </a:rPr>
+              <a:t>class weight тохируулга ашигласан</a:t>
+            </a:r>
+            <a:endParaRPr lang="en-US" sz="1100" dirty="0"/>
+          </a:p>
+        </p:txBody>
+      </p:sp>
+      <p:sp>
+        <p:nvSpPr>
+          <p:cNvPr id="36" name="Shape 34"/>
+          <p:cNvSpPr/>
+          <p:nvPr/>
+        </p:nvSpPr>
+        <p:spPr>
+          <a:xfrm>
+            <a:off x="411480" y="4224528"/>
+            <a:ext cx="4754880" cy="594360"/>
+          </a:xfrm>
+          <a:prstGeom prst="rect">
+            <a:avLst/>
+          </a:prstGeom>
+          <a:solidFill>
+            <a:srgbClr val="F3F7FB"/>
           </a:solidFill>
           <a:ln w="9525">
             <a:solidFill>
@@ -4396,490 +4844,6 @@
       </p:sp>
       <p:sp>
         <p:nvSpPr>
-          <p:cNvPr id="22" name="Text 20"/>
-          <p:cNvSpPr/>
-          <p:nvPr/>
-        </p:nvSpPr>
-        <p:spPr>
-          <a:xfrm>
-            <a:off x="5577840" y="1005840"/>
-            <a:ext cx="3154680" cy="365760"/>
-          </a:xfrm>
-          <a:prstGeom prst="rect">
-            <a:avLst/>
-          </a:prstGeom>
-          <a:noFill/>
-          <a:ln/>
-        </p:spPr>
-        <p:txBody>
-          <a:bodyPr wrap="square" rtlCol="0" anchor="t"/>
-          <a:lstStyle/>
-          <a:p>
-            <a:pPr marL="0" indent="0" algn="ctr">
-              <a:buNone/>
-            </a:pPr>
-            <a:r>
-              <a:rPr lang="en-US" sz="1300" b="1" dirty="0">
-                <a:solidFill>
-                  <a:srgbClr val="1A3A5C"/>
-                </a:solidFill>
-                <a:latin typeface="Calibri" pitchFamily="34" charset="0"/>
-                <a:ea typeface="Calibri" pitchFamily="34" charset="-122"/>
-                <a:cs typeface="Calibri" pitchFamily="34" charset="-120"/>
-              </a:rPr>
-              <a:t>Ангиллын тархалт</a:t>
-            </a:r>
-            <a:endParaRPr lang="en-US" sz="1300" dirty="0"/>
-          </a:p>
-        </p:txBody>
-      </p:sp>
-      <p:sp>
-        <p:nvSpPr>
-          <p:cNvPr id="23" name="Shape 21"/>
-          <p:cNvSpPr/>
-          <p:nvPr/>
-        </p:nvSpPr>
-        <p:spPr>
-          <a:xfrm>
-            <a:off x="5715000" y="1389888"/>
-            <a:ext cx="2880360" cy="0"/>
-          </a:xfrm>
-          <a:prstGeom prst="line">
-            <a:avLst/>
-          </a:prstGeom>
-          <a:noFill/>
-          <a:ln w="6350">
-            <a:solidFill>
-              <a:srgbClr val="D0D8E0"/>
-            </a:solidFill>
-            <a:prstDash val="solid"/>
-          </a:ln>
-        </p:spPr>
-      </p:sp>
-      <p:sp>
-        <p:nvSpPr>
-          <p:cNvPr id="24" name="Text 22"/>
-          <p:cNvSpPr/>
-          <p:nvPr/>
-        </p:nvSpPr>
-        <p:spPr>
-          <a:xfrm>
-            <a:off x="5715000" y="1600200"/>
-            <a:ext cx="2011680" cy="274320"/>
-          </a:xfrm>
-          <a:prstGeom prst="rect">
-            <a:avLst/>
-          </a:prstGeom>
-          <a:noFill/>
-          <a:ln/>
-        </p:spPr>
-        <p:txBody>
-          <a:bodyPr wrap="square" rtlCol="0" anchor="t"/>
-          <a:lstStyle/>
-          <a:p>
-            <a:pPr marL="0" indent="0" algn="l">
-              <a:buNone/>
-            </a:pPr>
-            <a:r>
-              <a:rPr lang="en-US" sz="1200" dirty="0">
-                <a:solidFill>
-                  <a:srgbClr val="1C2733"/>
-                </a:solidFill>
-                <a:latin typeface="Calibri" pitchFamily="34" charset="0"/>
-                <a:ea typeface="Calibri" pitchFamily="34" charset="-122"/>
-                <a:cs typeface="Calibri" pitchFamily="34" charset="-120"/>
-              </a:rPr>
-              <a:t>Хэвийн бус</a:t>
-            </a:r>
-            <a:endParaRPr lang="en-US" sz="1200" dirty="0"/>
-          </a:p>
-        </p:txBody>
-      </p:sp>
-      <p:sp>
-        <p:nvSpPr>
-          <p:cNvPr id="25" name="Text 23"/>
-          <p:cNvSpPr/>
-          <p:nvPr/>
-        </p:nvSpPr>
-        <p:spPr>
-          <a:xfrm>
-            <a:off x="7360920" y="1600200"/>
-            <a:ext cx="1188720" cy="274320"/>
-          </a:xfrm>
-          <a:prstGeom prst="rect">
-            <a:avLst/>
-          </a:prstGeom>
-          <a:noFill/>
-          <a:ln/>
-        </p:spPr>
-        <p:txBody>
-          <a:bodyPr wrap="square" rtlCol="0" anchor="t"/>
-          <a:lstStyle/>
-          <a:p>
-            <a:pPr marL="0" indent="0" algn="r">
-              <a:buNone/>
-            </a:pPr>
-            <a:r>
-              <a:rPr lang="en-US" sz="1200" dirty="0">
-                <a:solidFill>
-                  <a:srgbClr val="6B7A8A"/>
-                </a:solidFill>
-                <a:latin typeface="Calibri" pitchFamily="34" charset="0"/>
-                <a:ea typeface="Calibri" pitchFamily="34" charset="-122"/>
-                <a:cs typeface="Calibri" pitchFamily="34" charset="-120"/>
-              </a:rPr>
-              <a:t>2,575</a:t>
-            </a:r>
-            <a:endParaRPr lang="en-US" sz="1200" dirty="0"/>
-          </a:p>
-        </p:txBody>
-      </p:sp>
-      <p:sp>
-        <p:nvSpPr>
-          <p:cNvPr id="26" name="Shape 24"/>
-          <p:cNvSpPr/>
-          <p:nvPr/>
-        </p:nvSpPr>
-        <p:spPr>
-          <a:xfrm>
-            <a:off x="5715000" y="1920240"/>
-            <a:ext cx="2834640" cy="347472"/>
-          </a:xfrm>
-          <a:prstGeom prst="rect">
-            <a:avLst/>
-          </a:prstGeom>
-          <a:solidFill>
-            <a:srgbClr val="D0D8E0"/>
-          </a:solidFill>
-          <a:ln/>
-        </p:spPr>
-      </p:sp>
-      <p:sp>
-        <p:nvSpPr>
-          <p:cNvPr id="27" name="Shape 25"/>
-          <p:cNvSpPr/>
-          <p:nvPr/>
-        </p:nvSpPr>
-        <p:spPr>
-          <a:xfrm>
-            <a:off x="5715000" y="1920240"/>
-            <a:ext cx="2253539" cy="347472"/>
-          </a:xfrm>
-          <a:prstGeom prst="rect">
-            <a:avLst/>
-          </a:prstGeom>
-          <a:solidFill>
-            <a:srgbClr val="2563A8"/>
-          </a:solidFill>
-          <a:ln/>
-        </p:spPr>
-      </p:sp>
-      <p:sp>
-        <p:nvSpPr>
-          <p:cNvPr id="28" name="Text 26"/>
-          <p:cNvSpPr/>
-          <p:nvPr/>
-        </p:nvSpPr>
-        <p:spPr>
-          <a:xfrm>
-            <a:off x="5715000" y="1920240"/>
-            <a:ext cx="2834640" cy="347472"/>
-          </a:xfrm>
-          <a:prstGeom prst="rect">
-            <a:avLst/>
-          </a:prstGeom>
-          <a:noFill/>
-          <a:ln/>
-        </p:spPr>
-        <p:txBody>
-          <a:bodyPr wrap="square" rtlCol="0" anchor="ctr"/>
-          <a:lstStyle/>
-          <a:p>
-            <a:pPr marL="0" indent="0" algn="ctr">
-              <a:buNone/>
-            </a:pPr>
-            <a:r>
-              <a:rPr lang="en-US" sz="1200" b="1" dirty="0">
-                <a:solidFill>
-                  <a:srgbClr val="FFFFFF"/>
-                </a:solidFill>
-                <a:latin typeface="Calibri" pitchFamily="34" charset="0"/>
-                <a:ea typeface="Calibri" pitchFamily="34" charset="-122"/>
-                <a:cs typeface="Calibri" pitchFamily="34" charset="-120"/>
-              </a:rPr>
-              <a:t>79.5%</a:t>
-            </a:r>
-            <a:endParaRPr lang="en-US" sz="1200" dirty="0"/>
-          </a:p>
-        </p:txBody>
-      </p:sp>
-      <p:sp>
-        <p:nvSpPr>
-          <p:cNvPr id="29" name="Text 27"/>
-          <p:cNvSpPr/>
-          <p:nvPr/>
-        </p:nvSpPr>
-        <p:spPr>
-          <a:xfrm>
-            <a:off x="5715000" y="2971800"/>
-            <a:ext cx="2011680" cy="274320"/>
-          </a:xfrm>
-          <a:prstGeom prst="rect">
-            <a:avLst/>
-          </a:prstGeom>
-          <a:noFill/>
-          <a:ln/>
-        </p:spPr>
-        <p:txBody>
-          <a:bodyPr wrap="square" rtlCol="0" anchor="t"/>
-          <a:lstStyle/>
-          <a:p>
-            <a:pPr marL="0" indent="0" algn="l">
-              <a:buNone/>
-            </a:pPr>
-            <a:r>
-              <a:rPr lang="en-US" sz="1200" dirty="0">
-                <a:solidFill>
-                  <a:srgbClr val="1C2733"/>
-                </a:solidFill>
-                <a:latin typeface="Calibri" pitchFamily="34" charset="0"/>
-                <a:ea typeface="Calibri" pitchFamily="34" charset="-122"/>
-                <a:cs typeface="Calibri" pitchFamily="34" charset="-120"/>
-              </a:rPr>
-              <a:t>Хэвийн</a:t>
-            </a:r>
-            <a:endParaRPr lang="en-US" sz="1200" dirty="0"/>
-          </a:p>
-        </p:txBody>
-      </p:sp>
-      <p:sp>
-        <p:nvSpPr>
-          <p:cNvPr id="30" name="Text 28"/>
-          <p:cNvSpPr/>
-          <p:nvPr/>
-        </p:nvSpPr>
-        <p:spPr>
-          <a:xfrm>
-            <a:off x="7360920" y="2971800"/>
-            <a:ext cx="1188720" cy="274320"/>
-          </a:xfrm>
-          <a:prstGeom prst="rect">
-            <a:avLst/>
-          </a:prstGeom>
-          <a:noFill/>
-          <a:ln/>
-        </p:spPr>
-        <p:txBody>
-          <a:bodyPr wrap="square" rtlCol="0" anchor="t"/>
-          <a:lstStyle/>
-          <a:p>
-            <a:pPr marL="0" indent="0" algn="r">
-              <a:buNone/>
-            </a:pPr>
-            <a:r>
-              <a:rPr lang="en-US" sz="1200" dirty="0">
-                <a:solidFill>
-                  <a:srgbClr val="6B7A8A"/>
-                </a:solidFill>
-                <a:latin typeface="Calibri" pitchFamily="34" charset="0"/>
-                <a:ea typeface="Calibri" pitchFamily="34" charset="-122"/>
-                <a:cs typeface="Calibri" pitchFamily="34" charset="-120"/>
-              </a:rPr>
-              <a:t>665</a:t>
-            </a:r>
-            <a:endParaRPr lang="en-US" sz="1200" dirty="0"/>
-          </a:p>
-        </p:txBody>
-      </p:sp>
-      <p:sp>
-        <p:nvSpPr>
-          <p:cNvPr id="31" name="Shape 29"/>
-          <p:cNvSpPr/>
-          <p:nvPr/>
-        </p:nvSpPr>
-        <p:spPr>
-          <a:xfrm>
-            <a:off x="5715000" y="3291840"/>
-            <a:ext cx="2834640" cy="347472"/>
-          </a:xfrm>
-          <a:prstGeom prst="rect">
-            <a:avLst/>
-          </a:prstGeom>
-          <a:solidFill>
-            <a:srgbClr val="D0D8E0"/>
-          </a:solidFill>
-          <a:ln/>
-        </p:spPr>
-      </p:sp>
-      <p:sp>
-        <p:nvSpPr>
-          <p:cNvPr id="32" name="Shape 30"/>
-          <p:cNvSpPr/>
-          <p:nvPr/>
-        </p:nvSpPr>
-        <p:spPr>
-          <a:xfrm>
-            <a:off x="5715000" y="3291840"/>
-            <a:ext cx="581101" cy="347472"/>
-          </a:xfrm>
-          <a:prstGeom prst="rect">
-            <a:avLst/>
-          </a:prstGeom>
-          <a:solidFill>
-            <a:srgbClr val="4A7FB5"/>
-          </a:solidFill>
-          <a:ln/>
-        </p:spPr>
-      </p:sp>
-      <p:sp>
-        <p:nvSpPr>
-          <p:cNvPr id="33" name="Text 31"/>
-          <p:cNvSpPr/>
-          <p:nvPr/>
-        </p:nvSpPr>
-        <p:spPr>
-          <a:xfrm>
-            <a:off x="5715000" y="3291840"/>
-            <a:ext cx="2834640" cy="347472"/>
-          </a:xfrm>
-          <a:prstGeom prst="rect">
-            <a:avLst/>
-          </a:prstGeom>
-          <a:noFill/>
-          <a:ln/>
-        </p:spPr>
-        <p:txBody>
-          <a:bodyPr wrap="square" rtlCol="0" anchor="ctr"/>
-          <a:lstStyle/>
-          <a:p>
-            <a:pPr marL="0" indent="0" algn="ctr">
-              <a:buNone/>
-            </a:pPr>
-            <a:r>
-              <a:rPr lang="en-US" sz="1200" b="1" dirty="0">
-                <a:solidFill>
-                  <a:srgbClr val="FFFFFF"/>
-                </a:solidFill>
-                <a:latin typeface="Calibri" pitchFamily="34" charset="0"/>
-                <a:ea typeface="Calibri" pitchFamily="34" charset="-122"/>
-                <a:cs typeface="Calibri" pitchFamily="34" charset="-120"/>
-              </a:rPr>
-              <a:t>20.5%</a:t>
-            </a:r>
-            <a:endParaRPr lang="en-US" sz="1200" dirty="0"/>
-          </a:p>
-        </p:txBody>
-      </p:sp>
-      <p:sp>
-        <p:nvSpPr>
-          <p:cNvPr id="34" name="Shape 32"/>
-          <p:cNvSpPr/>
-          <p:nvPr/>
-        </p:nvSpPr>
-        <p:spPr>
-          <a:xfrm>
-            <a:off x="5715000" y="4133088"/>
-            <a:ext cx="2834640" cy="530352"/>
-          </a:xfrm>
-          <a:prstGeom prst="rect">
-            <a:avLst/>
-          </a:prstGeom>
-          <a:solidFill>
-            <a:srgbClr val="D6E4F0">
-              <a:alpha val="70000"/>
-            </a:srgbClr>
-          </a:solidFill>
-          <a:ln w="9525">
-            <a:solidFill>
-              <a:srgbClr val="4A7FB5"/>
-            </a:solidFill>
-            <a:prstDash val="solid"/>
-          </a:ln>
-        </p:spPr>
-      </p:sp>
-      <p:sp>
-        <p:nvSpPr>
-          <p:cNvPr id="35" name="Text 33"/>
-          <p:cNvSpPr/>
-          <p:nvPr/>
-        </p:nvSpPr>
-        <p:spPr>
-          <a:xfrm>
-            <a:off x="5852160" y="4178808"/>
-            <a:ext cx="2651760" cy="457200"/>
-          </a:xfrm>
-          <a:prstGeom prst="rect">
-            <a:avLst/>
-          </a:prstGeom>
-          <a:noFill/>
-          <a:ln/>
-        </p:spPr>
-        <p:txBody>
-          <a:bodyPr wrap="square" rtlCol="0" anchor="t"/>
-          <a:lstStyle/>
-          <a:p>
-            <a:pPr marL="0" indent="0" algn="l">
-              <a:buNone/>
-            </a:pPr>
-            <a:r>
-              <a:rPr lang="en-US" sz="1100" dirty="0">
-                <a:solidFill>
-                  <a:srgbClr val="1A3A5C"/>
-                </a:solidFill>
-                <a:latin typeface="Calibri" pitchFamily="34" charset="0"/>
-                <a:ea typeface="Calibri" pitchFamily="34" charset="-122"/>
-                <a:cs typeface="Calibri" pitchFamily="34" charset="-120"/>
-              </a:rPr>
-              <a:t>Тэнцвэргүй тархалт →</a:t>
-            </a:r>
-            <a:endParaRPr lang="en-US" sz="1100" dirty="0"/>
-          </a:p>
-          <a:p>
-            <a:pPr marL="0" indent="0" algn="l">
-              <a:buNone/>
-            </a:pPr>
-            <a:r>
-              <a:rPr lang="en-US" sz="1100" dirty="0">
-                <a:solidFill>
-                  <a:srgbClr val="1A3A5C"/>
-                </a:solidFill>
-                <a:latin typeface="Calibri" pitchFamily="34" charset="0"/>
-                <a:ea typeface="Calibri" pitchFamily="34" charset="-122"/>
-                <a:cs typeface="Calibri" pitchFamily="34" charset="-120"/>
-              </a:rPr>
-              <a:t>class weight тохируулга ашигласан</a:t>
-            </a:r>
-            <a:endParaRPr lang="en-US" sz="1100" dirty="0"/>
-          </a:p>
-        </p:txBody>
-      </p:sp>
-      <p:sp>
-        <p:nvSpPr>
-          <p:cNvPr id="36" name="Shape 34"/>
-          <p:cNvSpPr/>
-          <p:nvPr/>
-        </p:nvSpPr>
-        <p:spPr>
-          <a:xfrm>
-            <a:off x="411480" y="4224528"/>
-            <a:ext cx="4754880" cy="594360"/>
-          </a:xfrm>
-          <a:prstGeom prst="rect">
-            <a:avLst/>
-          </a:prstGeom>
-          <a:solidFill>
-            <a:srgbClr val="F3F7FB"/>
-          </a:solidFill>
-          <a:ln w="9525">
-            <a:solidFill>
-              <a:srgbClr val="D0D8E0"/>
-            </a:solidFill>
-            <a:prstDash val="solid"/>
-          </a:ln>
-        </p:spPr>
-      </p:sp>
-      <p:sp>
-        <p:nvSpPr>
           <p:cNvPr id="37" name="Text 35"/>
           <p:cNvSpPr/>
           <p:nvPr/>
@@ -4917,6 +4881,36 @@
           </a:p>
         </p:txBody>
       </p:sp>
+      <p:pic>
+        <p:nvPicPr>
+          <p:cNvPr id="39" name="Picture 38">
+            <a:extLst>
+              <a:ext uri="{FF2B5EF4-FFF2-40B4-BE49-F238E27FC236}">
+                <a16:creationId xmlns:a16="http://schemas.microsoft.com/office/drawing/2014/main" id="{3FE6C2C6-FBB6-EA77-02EF-4A6ECC827475}"/>
+              </a:ext>
+            </a:extLst>
+          </p:cNvPr>
+          <p:cNvPicPr>
+            <a:picLocks noChangeAspect="1"/>
+          </p:cNvPicPr>
+          <p:nvPr/>
+        </p:nvPicPr>
+        <p:blipFill>
+          <a:blip r:embed="rId3"/>
+          <a:stretch>
+            <a:fillRect/>
+          </a:stretch>
+        </p:blipFill>
+        <p:spPr>
+          <a:xfrm>
+            <a:off x="5427841" y="3838560"/>
+            <a:ext cx="3500397" cy="943740"/>
+          </a:xfrm>
+          <a:prstGeom prst="rect">
+            <a:avLst/>
+          </a:prstGeom>
+        </p:spPr>
+      </p:pic>
     </p:spTree>
   </p:cSld>
   <p:clrMapOvr>
